--- a/media/exports/reports/2026-01/volunteers.pptx
+++ b/media/exports/reports/2026-01/volunteers.pptx
@@ -197,22 +197,22 @@
               <c:strCache>
                 <c:ptCount val="6"/>
                 <c:pt idx="0">
-                  <c:v>Mental health first aid</c:v>
+                  <c:v>Volunteer coordinator</c:v>
                 </c:pt>
                 <c:pt idx="1">
                   <c:v>Digital literacy</c:v>
                 </c:pt>
                 <c:pt idx="2">
-                  <c:v>Volunteer coordinator</c:v>
+                  <c:v>Housing support</c:v>
                 </c:pt>
                 <c:pt idx="3">
+                  <c:v>Youth outreach</c:v>
+                </c:pt>
+                <c:pt idx="4">
                   <c:v>Community meals</c:v>
                 </c:pt>
-                <c:pt idx="4">
-                  <c:v>Youth outreach</c:v>
-                </c:pt>
                 <c:pt idx="5">
-                  <c:v>Housing support</c:v>
+                  <c:v>Mental health first aid</c:v>
                 </c:pt>
               </c:strCache>
             </c:strRef>
@@ -224,22 +224,22 @@
                 <c:formatCode>#,##0;[Red](#,##0)</c:formatCode>
                 <c:ptCount val="6"/>
                 <c:pt idx="0">
-                  <c:v>73.5</c:v>
+                  <c:v>57.5</c:v>
                 </c:pt>
                 <c:pt idx="1">
-                  <c:v>117.0</c:v>
+                  <c:v>95.5</c:v>
                 </c:pt>
                 <c:pt idx="2">
-                  <c:v>121.0</c:v>
+                  <c:v>150.0</c:v>
                 </c:pt>
                 <c:pt idx="3">
-                  <c:v>129.0</c:v>
+                  <c:v>162.0</c:v>
                 </c:pt>
                 <c:pt idx="4">
-                  <c:v>132.0</c:v>
+                  <c:v>166.0</c:v>
                 </c:pt>
                 <c:pt idx="5">
-                  <c:v>139.0</c:v>
+                  <c:v>186.5</c:v>
                 </c:pt>
               </c:numCache>
             </c:numRef>
@@ -303,7 +303,7 @@
       <c:valAx>
         <c:axId val="-2113994440"/>
         <c:scaling>
-          <c:max val="159.85"/>
+          <c:max val="214.475"/>
           <c:min val="0.0"/>
         </c:scaling>
         <c:delete/>
@@ -445,52 +445,52 @@
                 <c:formatCode>#,##0;[Red](#,##0)</c:formatCode>
                 <c:ptCount val="16"/>
                 <c:pt idx="0">
-                  <c:v>317.5</c:v>
+                  <c:v>381.0</c:v>
                 </c:pt>
                 <c:pt idx="1">
-                  <c:v>392.0</c:v>
+                  <c:v>373.5</c:v>
                 </c:pt>
                 <c:pt idx="2">
-                  <c:v>363.5</c:v>
+                  <c:v>383.5</c:v>
                 </c:pt>
                 <c:pt idx="3">
-                  <c:v>399.0</c:v>
+                  <c:v>387.5</c:v>
                 </c:pt>
                 <c:pt idx="4">
-                  <c:v>422.0</c:v>
+                  <c:v>376.5</c:v>
                 </c:pt>
                 <c:pt idx="5">
-                  <c:v>451.5</c:v>
+                  <c:v>444.0</c:v>
                 </c:pt>
                 <c:pt idx="6">
-                  <c:v>445.0</c:v>
+                  <c:v>422.5</c:v>
                 </c:pt>
                 <c:pt idx="7">
-                  <c:v>513.0</c:v>
+                  <c:v>562.0</c:v>
                 </c:pt>
                 <c:pt idx="8">
-                  <c:v>529.0</c:v>
+                  <c:v>568.0</c:v>
                 </c:pt>
                 <c:pt idx="9">
-                  <c:v>586.0</c:v>
+                  <c:v>609.5</c:v>
                 </c:pt>
                 <c:pt idx="10">
-                  <c:v>560.5</c:v>
+                  <c:v>627.0</c:v>
                 </c:pt>
                 <c:pt idx="11">
-                  <c:v>625.5</c:v>
+                  <c:v>708.5</c:v>
                 </c:pt>
                 <c:pt idx="12">
-                  <c:v>669.5</c:v>
+                  <c:v>817.0</c:v>
                 </c:pt>
                 <c:pt idx="13">
-                  <c:v>626.5</c:v>
+                  <c:v>780.5</c:v>
                 </c:pt>
                 <c:pt idx="14">
-                  <c:v>683.0</c:v>
+                  <c:v>830.5</c:v>
                 </c:pt>
                 <c:pt idx="15">
-                  <c:v>711.5</c:v>
+                  <c:v>817.5</c:v>
                 </c:pt>
               </c:numCache>
             </c:numRef>
@@ -539,7 +539,7 @@
         <c:axId val="-2100718248"/>
         <c:scaling>
           <c:orientation val="minMax"/>
-          <c:max val="800.0"/>
+          <c:max val="1000.0"/>
           <c:min val="0.0"/>
         </c:scaling>
         <c:delete val="0"/>
@@ -1064,7 +1064,7 @@
           <a:lstStyle/>
           <a:p>
             <a:r>
-              <a:t>How many volunteer hours go into each program?. Volunteer hours, January: 711.5 h; Volunteers who did a shift, January: 48; Hours per volunteer, January: 14.8 h; January last year: 399.0 h. 48 volunteers gave 711.5 h in January, against 683.0 h in December. Housing support drew the most (139.0 h, 19.5%). Mental health first aid had the fewest volunteer hours (73.5 h). Hours are up 78.3% on January last year.</a:t>
+              <a:t>How many volunteer hours go into each program?. Volunteer hours, January: 817.5 h; Volunteers who did a shift, January: 55; Hours per volunteer, January: 14.9 h; January last year: 387.5 h. 55 volunteers gave 817.5 h in January, against 830.5 h in December. Mental health first aid drew the most (186.5 h, 22.8%). Volunteer coordinator had the fewest volunteer hours (57.5 h). Hours are up 111.0% on January last year.</a:t>
             </a:r>
           </a:p>
         </p:txBody>
@@ -4549,7 +4549,7 @@
                 </a:solidFill>
                 <a:latin typeface="Roboto"/>
               </a:rPr>
-              <a:t>Data retrieved 2pm, Tue 6 Oct 2026 · Generated 8 Oct 2026, 6:29pm · Sample data · Made with Python (python-pptx)</a:t>
+              <a:t>Data retrieved 2pm, Tue 6 Oct 2026 · Generated 8 Oct 2026, 11:41pm · Sample data · Made with Python (python-pptx)</a:t>
             </a:r>
           </a:p>
         </p:txBody>
@@ -4895,7 +4895,7 @@
                 </a:solidFill>
                 <a:latin typeface="Roboto"/>
               </a:rPr>
-              <a:t>711.5 h</a:t>
+              <a:t>817.5 h</a:t>
             </a:r>
           </a:p>
         </p:txBody>
@@ -4934,7 +4934,7 @@
                 </a:solidFill>
                 <a:latin typeface="Roboto"/>
               </a:rPr>
-              <a:t>December 683.0 h</a:t>
+              <a:t>December 830.5 h</a:t>
             </a:r>
           </a:p>
         </p:txBody>
@@ -5061,7 +5061,7 @@
                 </a:solidFill>
                 <a:latin typeface="Roboto"/>
               </a:rPr>
-              <a:t>48</a:t>
+              <a:t>55</a:t>
             </a:r>
           </a:p>
         </p:txBody>
@@ -5100,7 +5100,7 @@
                 </a:solidFill>
                 <a:latin typeface="Roboto"/>
               </a:rPr>
-              <a:t>December 46</a:t>
+              <a:t>December 55</a:t>
             </a:r>
           </a:p>
         </p:txBody>
@@ -5227,7 +5227,7 @@
                 </a:solidFill>
                 <a:latin typeface="Roboto"/>
               </a:rPr>
-              <a:t>14.8 h</a:t>
+              <a:t>14.9 h</a:t>
             </a:r>
           </a:p>
         </p:txBody>
@@ -5393,7 +5393,7 @@
                 </a:solidFill>
                 <a:latin typeface="Roboto"/>
               </a:rPr>
-              <a:t>399.0 h</a:t>
+              <a:t>387.5 h</a:t>
             </a:r>
           </a:p>
         </p:txBody>
@@ -5432,7 +5432,7 @@
                 </a:solidFill>
                 <a:latin typeface="Roboto"/>
               </a:rPr>
-              <a:t>28 volunteers</a:t>
+              <a:t>25 volunteers</a:t>
             </a:r>
           </a:p>
         </p:txBody>
@@ -5577,7 +5577,7 @@
                 </a:solidFill>
                 <a:latin typeface="Roboto"/>
               </a:rPr>
-              <a:t>48 volunteers gave 711.5 h in January, against 683.0 h in December. Housing support drew the most (139.0 h, 19.5%).</a:t>
+              <a:t>55 volunteers gave 817.5 h in January, against 830.5 h in December. Mental health first aid drew the most (186.5 h, 22.8%).</a:t>
             </a:r>
           </a:p>
         </p:txBody>
@@ -5704,7 +5704,7 @@
                 </a:solidFill>
                 <a:latin typeface="Roboto"/>
               </a:rPr>
-              <a:t>Mental health first aid had the fewest volunteer hours (73.5 h). Hours are up 78.3% on January last year.</a:t>
+              <a:t>Volunteer coordinator had the fewest volunteer hours (57.5 h). Hours are up 111.0% on January last year.</a:t>
             </a:r>
           </a:p>
         </p:txBody>
@@ -5782,7 +5782,7 @@
                 </a:solidFill>
                 <a:latin typeface="Roboto"/>
               </a:rPr>
-              <a:t>Data retrieved 2pm, Tue 6 Oct 2026 · Generated 8 Oct 2026, 6:29pm · Sample data · Made with Python (python-pptx)</a:t>
+              <a:t>Data retrieved 2pm, Tue 6 Oct 2026 · Generated 8 Oct 2026, 11:41pm · Sample data · Made with Python (python-pptx)</a:t>
             </a:r>
           </a:p>
         </p:txBody>
@@ -6097,7 +6097,7 @@
                 </a:solidFill>
                 <a:latin typeface="Roboto"/>
               </a:rPr>
-              <a:t>Data retrieved 2pm, Tue 6 Oct 2026 · Generated 8 Oct 2026, 6:29pm · Sample data · Made with Python (python-pptx)</a:t>
+              <a:t>Data retrieved 2pm, Tue 6 Oct 2026 · Generated 8 Oct 2026, 11:41pm · Sample data · Made with Python (python-pptx)</a:t>
             </a:r>
           </a:p>
         </p:txBody>

--- a/media/exports/reports/2026-01/volunteers.pptx
+++ b/media/exports/reports/2026-01/volunteers.pptx
@@ -994,7 +994,7 @@
           <a:lstStyle/>
           <a:p>
             <a:r>
-              <a:t>How many volunteer hours go into each program?. Sample Community Services Ltd. Period: January 2026. Every volunteer shift: who (a code, not a name), which program, and how many hours.</a:t>
+              <a:t>How many volunteer hours go into each program?. Sample Community Services Ltd. Period: January 2026. In short: 817.5 h of volunteer time in January, from 55 volunteers; most went to Mental health first aid. Every volunteer shift: who (a code, not a name), which program, and how many hours.</a:t>
             </a:r>
           </a:p>
         </p:txBody>
@@ -4359,7 +4359,7 @@
         <p:spPr>
           <a:xfrm>
             <a:off x="457200" y="3703320"/>
-            <a:ext cx="11277295" cy="313690"/>
+            <a:ext cx="11277295" cy="535940"/>
           </a:xfrm>
           <a:prstGeom prst="rect">
             <a:avLst/>
@@ -4384,7 +4384,7 @@
                 </a:solidFill>
                 <a:latin typeface="Roboto"/>
               </a:rPr>
-              <a:t>Period: January 2026. Every volunteer shift: who (a code, not a name), which program, and how many hours.</a:t>
+              <a:t>Period: January 2026. In short: 817.5 h of volunteer time in January, from 55 volunteers; most went to Mental health first aid. Every volunteer shift: who (a code, not a name), which program, and how many hours.</a:t>
             </a:r>
           </a:p>
         </p:txBody>
@@ -4397,7 +4397,7 @@
         </p:nvSpPr>
         <p:spPr>
           <a:xfrm>
-            <a:off x="457200" y="4108450"/>
+            <a:off x="457200" y="4330700"/>
             <a:ext cx="11277295" cy="1097280"/>
           </a:xfrm>
           <a:prstGeom prst="rect">
@@ -4549,7 +4549,7 @@
                 </a:solidFill>
                 <a:latin typeface="Roboto"/>
               </a:rPr>
-              <a:t>Data retrieved 2pm, Tue 6 Oct 2026 · Generated 8 Oct 2026, 11:41pm · Sample data · Made with Python (python-pptx)</a:t>
+              <a:t>Data retrieved 2pm, Tue 6 Oct 2026 · Generated 10 Oct 2026, 9:55pm · Sample data · Made with Python (python-pptx)</a:t>
             </a:r>
           </a:p>
         </p:txBody>
@@ -5782,7 +5782,7 @@
                 </a:solidFill>
                 <a:latin typeface="Roboto"/>
               </a:rPr>
-              <a:t>Data retrieved 2pm, Tue 6 Oct 2026 · Generated 8 Oct 2026, 11:41pm · Sample data · Made with Python (python-pptx)</a:t>
+              <a:t>Data retrieved 2pm, Tue 6 Oct 2026 · Generated 10 Oct 2026, 9:55pm · Sample data · Made with Python (python-pptx)</a:t>
             </a:r>
           </a:p>
         </p:txBody>
@@ -6097,7 +6097,7 @@
                 </a:solidFill>
                 <a:latin typeface="Roboto"/>
               </a:rPr>
-              <a:t>Data retrieved 2pm, Tue 6 Oct 2026 · Generated 8 Oct 2026, 11:41pm · Sample data · Made with Python (python-pptx)</a:t>
+              <a:t>Data retrieved 2pm, Tue 6 Oct 2026 · Generated 10 Oct 2026, 9:55pm · Sample data · Made with Python (python-pptx)</a:t>
             </a:r>
           </a:p>
         </p:txBody>
